--- a/data/employees/EMP049/AST-EMP049-01.pptx
+++ b/data/employees/EMP049/AST-EMP049-01.pptx
@@ -9,6 +9,7 @@
     <p:sldId id="257" r:id="rId8"/>
     <p:sldId id="258" r:id="rId9"/>
     <p:sldId id="259" r:id="rId10"/>
+    <p:sldId id="260" r:id="rId11"/>
   </p:sldIdLst>
   <p:sldSz cx="9144000" cy="6858000" type="screen4x3"/>
   <p:notesSz cx="6858000" cy="9144000"/>
@@ -3098,42 +3099,55 @@
             <a:spLocks noGrp="1"/>
           </p:cNvSpPr>
           <p:nvPr>
-            <p:ph type="ctrTitle"/>
-          </p:nvPr>
-        </p:nvSpPr>
-        <p:spPr/>
-        <p:txBody>
-          <a:bodyPr/>
-          <a:lstStyle/>
-          <a:p>
-            <a:r>
-              <a:t>Project update deck - EMP049</a:t>
-            </a:r>
-          </a:p>
-        </p:txBody>
-      </p:sp>
-      <p:sp>
-        <p:nvSpPr>
-          <p:cNvPr id="3" name="Subtitle 2"/>
-          <p:cNvSpPr>
-            <a:spLocks noGrp="1"/>
-          </p:cNvSpPr>
-          <p:nvPr>
-            <p:ph type="subTitle" idx="1"/>
-          </p:nvPr>
-        </p:nvSpPr>
-        <p:spPr/>
-        <p:txBody>
-          <a:bodyPr/>
-          <a:lstStyle/>
-          <a:p>
-            <a:r>
-              <a:t>Drew Kim | Architect | Manufacturing</a:t>
-            </a:r>
-          </a:p>
-          <a:p>
-            <a:r>
-              <a:t>Prepared: 2025-02-20</a:t>
+            <p:ph type="title"/>
+          </p:nvPr>
+        </p:nvSpPr>
+        <p:spPr/>
+        <p:txBody>
+          <a:bodyPr/>
+          <a:lstStyle/>
+          <a:p>
+            <a:r>
+              <a:t>Ast Emp049 01 - EMP049</a:t>
+            </a:r>
+          </a:p>
+        </p:txBody>
+      </p:sp>
+      <p:sp>
+        <p:nvSpPr>
+          <p:cNvPr id="3" name="Content Placeholder 2"/>
+          <p:cNvSpPr>
+            <a:spLocks noGrp="1"/>
+          </p:cNvSpPr>
+          <p:nvPr>
+            <p:ph idx="1"/>
+          </p:nvPr>
+        </p:nvSpPr>
+        <p:spPr/>
+        <p:txBody>
+          <a:bodyPr/>
+          <a:lstStyle/>
+          <a:p>
+            <a:r>
+              <a:t>Slide 1: Executive Summary</a:t>
+            </a:r>
+          </a:p>
+          <a:p>
+            <a:pPr lvl="1"/>
+            <a:r>
+              <a:t>Section 1: Knowledge transfer and onboarding. EMP049 contributes to ast emp049 01 through recurring collaboration, clear ownership boundaries, and measurable outcomes. The team captures decisions, open issues, and handoffs so that knowledge remains discoverable for future programs.</a:t>
+            </a:r>
+          </a:p>
+          <a:p>
+            <a:pPr lvl="1"/>
+            <a:r>
+              <a:t>Section 2: Operational risk review. EMP049 contributes to ast emp049 01 through recurring collaboration, clear ownership boundaries, and measurable outcomes. The team captures decisions, open issues, and handoffs so that knowledge remains discoverable for future programs.</a:t>
+            </a:r>
+          </a:p>
+          <a:p>
+            <a:pPr lvl="1"/>
+            <a:r>
+              <a:t>Section 3: Data quality remediation. EMP049 contributes to ast emp049 01 through recurring collaboration, clear ownership boundaries, and measurable outcomes. The team captures decisions, open issues, and handoffs so that knowledge remains discoverable for future programs.</a:t>
             </a:r>
           </a:p>
         </p:txBody>
@@ -3172,7 +3186,7 @@
           <a:lstStyle/>
           <a:p>
             <a:r>
-              <a:t>Production Line Efficiency</a:t>
+              <a:t>Ast Emp049 01 - EMP049</a:t>
             </a:r>
           </a:p>
         </p:txBody>
@@ -3193,17 +3207,25 @@
           <a:lstStyle/>
           <a:p>
             <a:r>
-              <a:t>Overview of Production Line Efficiency for Manufacturing department.</a:t>
-            </a:r>
-          </a:p>
-          <a:p>
-            <a:r>
-              <a:t>Responsible: Drew Kim (Architect)</a:t>
-            </a:r>
-          </a:p>
-          <a:p>
-            <a:r>
-              <a:t>Location: Portland | Skills: Ontology, SQL, Python, Fabric</a:t>
+              <a:t>Slide 2: Executive Summary</a:t>
+            </a:r>
+          </a:p>
+          <a:p>
+            <a:pPr lvl="1"/>
+            <a:r>
+              <a:t>Section 1: Quarterly delivery milestones. EMP049 contributes to ast emp049 01 through recurring collaboration, clear ownership boundaries, and measurable outcomes. The team captures decisions, open issues, and handoffs so that knowledge remains discoverable for future programs.</a:t>
+            </a:r>
+          </a:p>
+          <a:p>
+            <a:pPr lvl="1"/>
+            <a:r>
+              <a:t>Section 2: Automation backlog refinement. EMP049 contributes to ast emp049 01 through recurring collaboration, clear ownership boundaries, and measurable outcomes. The team captures decisions, open issues, and handoffs so that knowledge remains discoverable for future programs.</a:t>
+            </a:r>
+          </a:p>
+          <a:p>
+            <a:pPr lvl="1"/>
+            <a:r>
+              <a:t>Section 3: Data quality remediation. EMP049 contributes to ast emp049 01 through recurring collaboration, clear ownership boundaries, and measurable outcomes. The team captures decisions, open issues, and handoffs so that knowledge remains discoverable for future programs.</a:t>
             </a:r>
           </a:p>
         </p:txBody>
@@ -3242,7 +3264,7 @@
           <a:lstStyle/>
           <a:p>
             <a:r>
-              <a:t>Equipment OEE Metrics</a:t>
+              <a:t>Ast Emp049 01 - EMP049</a:t>
             </a:r>
           </a:p>
         </p:txBody>
@@ -3263,17 +3285,25 @@
           <a:lstStyle/>
           <a:p>
             <a:r>
-              <a:t>Overview of Equipment OEE Metrics for Manufacturing department.</a:t>
-            </a:r>
-          </a:p>
-          <a:p>
-            <a:r>
-              <a:t>Responsible: Drew Kim (Architect)</a:t>
-            </a:r>
-          </a:p>
-          <a:p>
-            <a:r>
-              <a:t>Location: Portland | Skills: Ontology, SQL, Python, Fabric</a:t>
+              <a:t>Slide 3: Executive Summary</a:t>
+            </a:r>
+          </a:p>
+          <a:p>
+            <a:pPr lvl="1"/>
+            <a:r>
+              <a:t>Section 1: Department KPI performance. EMP049 contributes to ast emp049 01 through recurring collaboration, clear ownership boundaries, and measurable outcomes. The team captures decisions, open issues, and handoffs so that knowledge remains discoverable for future programs.</a:t>
+            </a:r>
+          </a:p>
+          <a:p>
+            <a:pPr lvl="1"/>
+            <a:r>
+              <a:t>Section 2: Knowledge transfer and onboarding. EMP049 contributes to ast emp049 01 through recurring collaboration, clear ownership boundaries, and measurable outcomes. The team captures decisions, open issues, and handoffs so that knowledge remains discoverable for future programs.</a:t>
+            </a:r>
+          </a:p>
+          <a:p>
+            <a:pPr lvl="1"/>
+            <a:r>
+              <a:t>Section 3: Automation backlog refinement. EMP049 contributes to ast emp049 01 through recurring collaboration, clear ownership boundaries, and measurable outcomes. The team captures decisions, open issues, and handoffs so that knowledge remains discoverable for future programs.</a:t>
             </a:r>
           </a:p>
         </p:txBody>
@@ -3312,7 +3342,7 @@
           <a:lstStyle/>
           <a:p>
             <a:r>
-              <a:t>Safety Compliance Update</a:t>
+              <a:t>Ast Emp049 01 - EMP049</a:t>
             </a:r>
           </a:p>
         </p:txBody>
@@ -3333,17 +3363,103 @@
           <a:lstStyle/>
           <a:p>
             <a:r>
-              <a:t>Overview of Safety Compliance Update for Manufacturing department.</a:t>
-            </a:r>
-          </a:p>
-          <a:p>
-            <a:r>
-              <a:t>Responsible: Drew Kim (Architect)</a:t>
-            </a:r>
-          </a:p>
-          <a:p>
-            <a:r>
-              <a:t>Location: Portland | Skills: Ontology, SQL, Python, Fabric</a:t>
+              <a:t>Slide 4: Executive Summary</a:t>
+            </a:r>
+          </a:p>
+          <a:p>
+            <a:pPr lvl="1"/>
+            <a:r>
+              <a:t>Section 1: Quarterly delivery milestones. EMP049 contributes to ast emp049 01 through recurring collaboration, clear ownership boundaries, and measurable outcomes. The team captures decisions, open issues, and handoffs so that knowledge remains discoverable for future programs.</a:t>
+            </a:r>
+          </a:p>
+          <a:p>
+            <a:pPr lvl="1"/>
+            <a:r>
+              <a:t>Section 2: Data quality remediation. EMP049 contributes to ast emp049 01 through recurring collaboration, clear ownership boundaries, and measurable outcomes. The team captures decisions, open issues, and handoffs so that knowledge remains discoverable for future programs.</a:t>
+            </a:r>
+          </a:p>
+          <a:p>
+            <a:pPr lvl="1"/>
+            <a:r>
+              <a:t>Section 3: Automation backlog refinement. EMP049 contributes to ast emp049 01 through recurring collaboration, clear ownership boundaries, and measurable outcomes. The team captures decisions, open issues, and handoffs so that knowledge remains discoverable for future programs.</a:t>
+            </a:r>
+          </a:p>
+        </p:txBody>
+      </p:sp>
+    </p:spTree>
+  </p:cSld>
+  <p:clrMapOvr>
+    <a:masterClrMapping/>
+  </p:clrMapOvr>
+</p:sld>
+</file>
+
+<file path=ppt/slides/slide5.xml><?xml version="1.0" encoding="utf-8"?>
+<p:sld xmlns:a="http://schemas.openxmlformats.org/drawingml/2006/main" xmlns:p="http://schemas.openxmlformats.org/presentationml/2006/main" xmlns:r="http://schemas.openxmlformats.org/officeDocument/2006/relationships">
+  <p:cSld>
+    <p:spTree>
+      <p:nvGrpSpPr>
+        <p:cNvPr id="1" name=""/>
+        <p:cNvGrpSpPr/>
+        <p:nvPr/>
+      </p:nvGrpSpPr>
+      <p:grpSpPr/>
+      <p:sp>
+        <p:nvSpPr>
+          <p:cNvPr id="2" name="Title 1"/>
+          <p:cNvSpPr>
+            <a:spLocks noGrp="1"/>
+          </p:cNvSpPr>
+          <p:nvPr>
+            <p:ph type="title"/>
+          </p:nvPr>
+        </p:nvSpPr>
+        <p:spPr/>
+        <p:txBody>
+          <a:bodyPr/>
+          <a:lstStyle/>
+          <a:p>
+            <a:r>
+              <a:t>Ast Emp049 01 - EMP049</a:t>
+            </a:r>
+          </a:p>
+        </p:txBody>
+      </p:sp>
+      <p:sp>
+        <p:nvSpPr>
+          <p:cNvPr id="3" name="Content Placeholder 2"/>
+          <p:cNvSpPr>
+            <a:spLocks noGrp="1"/>
+          </p:cNvSpPr>
+          <p:nvPr>
+            <p:ph idx="1"/>
+          </p:nvPr>
+        </p:nvSpPr>
+        <p:spPr/>
+        <p:txBody>
+          <a:bodyPr/>
+          <a:lstStyle/>
+          <a:p>
+            <a:r>
+              <a:t>Slide 5: Executive Summary</a:t>
+            </a:r>
+          </a:p>
+          <a:p>
+            <a:pPr lvl="1"/>
+            <a:r>
+              <a:t>Section 1: Knowledge transfer and onboarding. EMP049 contributes to ast emp049 01 through recurring collaboration, clear ownership boundaries, and measurable outcomes. The team captures decisions, open issues, and handoffs so that knowledge remains discoverable for future programs.</a:t>
+            </a:r>
+          </a:p>
+          <a:p>
+            <a:pPr lvl="1"/>
+            <a:r>
+              <a:t>Section 2: Knowledge transfer and onboarding. EMP049 contributes to ast emp049 01 through recurring collaboration, clear ownership boundaries, and measurable outcomes. The team captures decisions, open issues, and handoffs so that knowledge remains discoverable for future programs.</a:t>
+            </a:r>
+          </a:p>
+          <a:p>
+            <a:pPr lvl="1"/>
+            <a:r>
+              <a:t>Section 3: Quarterly delivery milestones. EMP049 contributes to ast emp049 01 through recurring collaboration, clear ownership boundaries, and measurable outcomes. The team captures decisions, open issues, and handoffs so that knowledge remains discoverable for future programs.</a:t>
             </a:r>
           </a:p>
         </p:txBody>
